--- a/courses/learn_clustering/module02-07-fiduccia-mattheyses/slides.pptx
+++ b/courses/learn_clustering/module02-07-fiduccia-mattheyses/slides.pptx
@@ -515,12 +515,6 @@
               <a:t>FM refines a bipartition with single-vertex moves, locking, and rollback—cousin to Kernighan–Lin, but one cell at a time. On the same bad seed that starts at cutsize twelve, FM reaches cutsize three.</a:t>
             </a:r>
           </a:p>
-          <a:p/>
-          <a:p>
-            <a:r>
-              <a:t>&lt;!-- algorithm-walkthrough --&gt;</a:t>
-            </a:r>
-          </a:p>
         </p:txBody>
       </p:sp>
       <p:sp>
@@ -939,12 +933,6 @@
           <a:p>
             <a:r>
               <a:t>A second FM pass finds no improving move prefix. Stop. In real tools, FM often runs inside multilevel V-cycles with tighter balance and hyperedges.</a:t>
-            </a:r>
-          </a:p>
-          <a:p/>
-          <a:p>
-            <a:r>
-              <a:t>&lt;!-- /algorithm-walkthrough --&gt;</a:t>
             </a:r>
           </a:p>
         </p:txBody>
@@ -5815,7 +5803,7 @@
                 <a:spcPts val="2200"/>
               </a:lnSpc>
               <a:spcAft>
-                <a:spcPts val="600"/>
+                <a:spcPts val="400"/>
               </a:spcAft>
             </a:pPr>
             <a:r>
@@ -5834,7 +5822,7 @@
                 <a:spcPts val="2200"/>
               </a:lnSpc>
               <a:spcAft>
-                <a:spcPts val="600"/>
+                <a:spcPts val="400"/>
               </a:spcAft>
             </a:pPr>
             <a:r>
@@ -5853,7 +5841,7 @@
                 <a:spcPts val="2200"/>
               </a:lnSpc>
               <a:spcAft>
-                <a:spcPts val="600"/>
+                <a:spcPts val="400"/>
               </a:spcAft>
             </a:pPr>
             <a:r>
@@ -5863,7 +5851,7 @@
                 </a:solidFill>
                 <a:latin typeface="Consolas"/>
               </a:rPr>
-              <a:t/>
+              <a:t>python ../common/solvers.py examples/tiny_graph.json --mode fm</a:t>
             </a:r>
           </a:p>
           <a:p>
@@ -5872,7 +5860,7 @@
                 <a:spcPts val="2200"/>
               </a:lnSpc>
               <a:spcAft>
-                <a:spcPts val="600"/>
+                <a:spcPts val="400"/>
               </a:spcAft>
             </a:pPr>
             <a:r>
@@ -5882,26 +5870,7 @@
                 </a:solidFill>
                 <a:latin typeface="Consolas"/>
               </a:rPr>
-              <a:t>python ../common/solvers.py examples/tiny_graph.json --mode fm --seed</a:t>
-            </a:r>
-          </a:p>
-          <a:p>
-            <a:pPr>
-              <a:lnSpc>
-                <a:spcPts val="2200"/>
-              </a:lnSpc>
-              <a:spcAft>
-                <a:spcPts val="600"/>
-              </a:spcAft>
-            </a:pPr>
-            <a:r>
-              <a:rPr sz="2000" b="0">
-                <a:solidFill>
-                  <a:srgbClr val="333333"/>
-                </a:solidFill>
-                <a:latin typeface="Consolas"/>
-              </a:rPr>
-              <a:t>../module02-05-kernighan-lin/examples/seed_partition.json</a:t>
+              <a:t>--seed ../module02-05-kernighan-lin/examples/seed_partition.json</a:t>
             </a:r>
           </a:p>
         </p:txBody>
